--- a/markdown/files/slides/lecture15_graphs1.pptx
+++ b/markdown/files/slides/lecture15_graphs1.pptx
@@ -3731,20 +3731,15 @@
           <a:p>
             <a:r>
               <a:rPr lang="en-US" dirty="0"/>
-              <a:t>CSE 332 Winter 2026</a:t>
+              <a:t>CSE 332 Spring 2026</a:t>
             </a:r>
             <a:br>
               <a:rPr lang="en-US" dirty="0"/>
             </a:br>
             <a:r>
               <a:rPr lang="en-US" dirty="0"/>
-              <a:t>Lecture 14</a:t>
+              <a:t>Lecture 15: graphs 1</a:t>
             </a:r>
-            <a:r>
-              <a:rPr lang="en-US"/>
-              <a:t>: Sorting 3</a:t>
-            </a:r>
-            <a:endParaRPr lang="en-US" dirty="0"/>
           </a:p>
         </p:txBody>
       </p:sp>
